--- a/dist/초5/사회·역사/국토와생활/초5_사회·역사_국토와생활_02_국토의자연환경.pptx
+++ b/dist/초5/사회·역사/국토와생활/초5_사회·역사_국토와생활_02_국토의자연환경.pptx
@@ -121,13 +121,13 @@
   <p:extLst>
     <p:ext uri="{521415D9-36F7-43E2-AB2F-B90AF26B5E84}">
       <p14:sectionLst xmlns:p14="http://schemas.microsoft.com/office/powerpoint/2010/main">
-        <p14:section name="도입" id="{3554c6e9-b50f-63a3-f2c6-0975ae28fff5}">
+        <p14:section name="도입" id="{94dfb832-edbb-99fa-b64b-f182b69e8c0e}">
           <p14:sldIdLst>
             <p14:sldId id="256"/>
             <p14:sldId id="257"/>
           </p14:sldIdLst>
         </p14:section>
-        <p14:section name="개념" id="{be34109b-2879-38e3-21cf-696d99ae2518}">
+        <p14:section name="개념" id="{5126c91e-f02b-8e5a-935a-c9b8e1e1896a}">
           <p14:sldIdLst>
             <p14:sldId id="258"/>
             <p14:sldId id="261"/>
@@ -135,7 +135,7 @@
             <p14:sldId id="264"/>
           </p14:sldIdLst>
         </p14:section>
-        <p14:section name="연습" id="{fb13a07f-0dce-bcc1-e285-6dfed2a87d96}">
+        <p14:section name="연습" id="{0e8a682d-3ce6-9885-0698-41397c30f17c}">
           <p14:sldIdLst>
             <p14:sldId id="259"/>
             <p14:sldId id="260"/>
@@ -143,31 +143,31 @@
             <p14:sldId id="265"/>
           </p14:sldIdLst>
         </p14:section>
-        <p14:section name="개념" id="{028a76ab-d9b7-2ad4-89de-ed06b2851fc7}">
+        <p14:section name="개념" id="{2f1b06fb-43ca-5961-be90-40e033269dcf}">
           <p14:sldIdLst/>
         </p14:section>
-        <p14:section name="연습" id="{ddd2b542-f59f-829e-15bb-5b8d28c4e5c6}">
+        <p14:section name="연습" id="{7970dbf8-7957-20f7-6cb7-e4b8df382795}">
           <p14:sldIdLst/>
         </p14:section>
-        <p14:section name="개념" id="{cc3fb2da-8e46-9da1-762d-ffeeaa2a93de}">
+        <p14:section name="개념" id="{cd5e3689-9c72-2d22-7729-774bc50ef135}">
           <p14:sldIdLst/>
         </p14:section>
-        <p14:section name="연습" id="{1ba859ce-c58a-eb8f-708f-097c0943e0b1}">
+        <p14:section name="연습" id="{83b3e985-0e4a-a384-b623-a96cad7d2658}">
           <p14:sldIdLst/>
         </p14:section>
-        <p14:section name="확인" id="{930400ac-2b9e-69d2-6748-df0c9ee351f9}">
+        <p14:section name="확인" id="{e0e1ec82-8fcd-572a-0b22-7545267ef266}">
           <p14:sldIdLst>
             <p14:sldId id="266"/>
             <p14:sldId id="267"/>
             <p14:sldId id="268"/>
           </p14:sldIdLst>
         </p14:section>
-        <p14:section name="정리" id="{3ff280a4-8ec0-50ba-d9e8-2938e4bc4615}">
+        <p14:section name="정리" id="{be6c4b06-ce4e-56e3-ff35-faa889a32be3}">
           <p14:sldIdLst>
             <p14:sldId id="269"/>
           </p14:sldIdLst>
         </p14:section>
-        <p14:section name="보충" id="{b961509a-c0cf-146a-7470-943bc8f8ca49}">
+        <p14:section name="보충" id="{ea57e203-015c-c481-1a63-92fead7e372d}">
           <p14:sldIdLst>
             <p14:sldId id="270"/>
           </p14:sldIdLst>
